--- a/catalog/samples/issue_action_columns.pptx
+++ b/catalog/samples/issue_action_columns.pptx
@@ -1372,7 +1372,7 @@
           </a:p>
           <a:p>
             <a:r>
-              <a:t>  "template_sha256": "beaf8187cd8c76fd8d8ac30839c0531c6fc496939a4a795f0f6d8bbcb4b957f3"</a:t>
+              <a:t>  "template_sha256": "e3a2ee6d32f02973c94a3c306b86c239a72688c93fbf852542da5e7589375646"</a:t>
             </a:r>
           </a:p>
           <a:p>
